--- a/output/BrandA_business_review.pptx
+++ b/output/BrandA_business_review.pptx
@@ -3128,7 +3128,7 @@
           <a:lstStyle/>
           <a:p>
             <a:r>
-              <a:t>Generated at 2026-04-07 11:56 UTC</a:t>
+              <a:t>Generated at 2026-04-07 12:06 UTC</a:t>
             </a:r>
           </a:p>
           <a:p>
